--- a/Foundation_F5/F5-L12_Review_and_Unit_Assessment_Food_Health_and_Body.pptx
+++ b/Foundation_F5/F5-L12_Review_and_Unit_Assessment_Food_Health_and_Body.pptx
@@ -527,7 +527,11 @@
           <a:lstStyle/>
           <a:p>
             <a:r>
-              <a:rPr lang="en-US" dirty="0"/>
+              <a:rPr lang="ar-SA" dirty="0">
+                <a:latin typeface="Amiri" pitchFamily="2" charset="-78"/>
+                <a:ea typeface="Amiri" pitchFamily="2" charset="-78"/>
+                <a:cs typeface="Amiri" pitchFamily="2" charset="-78"/>
+              </a:rPr>
               <a:t>LESSON AT A GLANCE — planned for 56 minutes, leaving about 4 minutes for Teams delays.
 0–1 Welcome · 1–2 Map · 2–6 Knowledge check (not marked) · 6–7 Assessment map · 7–20 Listening (15) · 20–32 Reading (15) · 32–46 Writing (15) · 46–56 Speaking (15, one-to-one or trusted pairs) · 56–60 Profile and F6 step.
 FLEX slides are optional. Use them if the class is moving quickly; otherwise the same activities are on the website for homework.
@@ -628,7 +632,11 @@
           <a:lstStyle/>
           <a:p>
             <a:r>
-              <a:rPr lang="en-US" dirty="0"/>
+              <a:rPr lang="ar-SA" dirty="0">
+                <a:latin typeface="Amiri" pitchFamily="2" charset="-78"/>
+                <a:ea typeface="Amiri" pitchFamily="2" charset="-78"/>
+                <a:cs typeface="Amiri" pitchFamily="2" charset="-78"/>
+              </a:rPr>
               <a:t>LISTENING TEXT 2 (website, 5 marks). Read twice at natural pace (website: each recording may be played twice); students answer after the second reading.
 SCRIPT: الطَّبِيبُ: مَا المُشْكِلَةُ؟ المَرِيضُ: عِنْدِي أَلَمٌ شَدِيدٌ فِي مَعِدَتِي مُنْذُ يَوْمَيْنِ، وَعِنْدِي حُمَّى خَفِيفَةٌ أَيْضًا. الطَّبِيبُ: هَلْ أَكَلْتَ طَعَامًا دَسِمًا؟ المَرِيضُ: نَعَمْ، أَكَلْتُ طَعَامًا دَسِمًا فِي المَطْعَمِ. الطَّبِيبُ: يَجِبُ أَنْ تَشْرَبَ المَاءَ وَأَنْ تَسْتَرِيحَ. لَا تَأْكُلْ طَعَامًا دَسِمًا اليَوْمَ. إِذَا اسْتَمَرَّ الأَلَمُ، فَارْجِعْ إِلَى العِيَادَةِ.
 Private chat: five letters.</a:t>
@@ -806,7 +814,11 @@
           <a:lstStyle/>
           <a:p>
             <a:r>
-              <a:rPr lang="en-US" dirty="0"/>
+              <a:rPr lang="ar-SA" dirty="0">
+                <a:latin typeface="Amiri" pitchFamily="2" charset="-78"/>
+                <a:ea typeface="Amiri" pitchFamily="2" charset="-78"/>
+                <a:cs typeface="Amiri" pitchFamily="2" charset="-78"/>
+              </a:rPr>
               <a:t>LISTENING TEXT 3 (website, 5 marks). Read twice at natural pace (website: each recording may be played twice); students answer after the second reading.
 SCRIPT: النَّادِلُ: مَسَاءُ الخَيْرِ. مَاذَا تُرِيدُ؟ الزَّبُونُ: أُرِيدُ طَبَقَ الكَبْسَةِ، مِنْ فَضْلِكَ. النَّادِلُ: الكَبْسَةُ تَتَكَوَّنُ مِنَ الأَرُزِّ وَالدَّجَاجِ وَالتَّوَابِلِ. هَلْ تُرِيدُ شَيْئًا مَعَهَا؟ الزَّبُونُ: نَعَمْ، أُرِيدُ سَلَطَةً صَغِيرَةً وَعَصِيرَ اللَّيْمُونِ. النَّادِلُ: حَسَنًا. الزَّبُونُ: شُكْرًا. وَبَعْدَ الطَّعَامِ: الحِسَابُ، لَوْ سَمَحْتَ.
 Private chat: five letters.</a:t>
@@ -984,7 +996,11 @@
           <a:lstStyle/>
           <a:p>
             <a:r>
-              <a:rPr lang="en-US" dirty="0"/>
+              <a:rPr lang="ar-SA" dirty="0">
+                <a:latin typeface="Amiri" pitchFamily="2" charset="-78"/>
+                <a:ea typeface="Amiri" pitchFamily="2" charset="-78"/>
+                <a:cs typeface="Amiri" pitchFamily="2" charset="-78"/>
+              </a:rPr>
               <a:t>READING TEXT 1 (website menu, reproduced as a table). No English support on assessment texts. Keep on screen while students answer (next slide).
 قَائِمَةُ مَطْعَمِ الوَاحَةِ · حَسَاءُ العَدَسِ مَعَ الخُبْزِ (نَبَاتِيٌّ): ٨ دَنَانِيرَ · الدَّجَاجُ مَعَ الأَرُزِّ: ١٨ دِينَارًا · السَّمَكُ المَشْوِيُّ مَعَ البَطَاطِسِ وَالسَّلَطَةِ: ٢٢ دِينَارًا · سَلَطَةُ الفَاكِهَةِ: ٧ دَنَانِيرَ · شَايٌ: ٣ دَنَانِيرَ · مَاءٌ مَعْدِنِيٌّ: ٤ · عَصِيرُ بُرْتُقَالٍ: ٦</a:t>
             </a:r>
@@ -1513,7 +1529,11 @@
           <a:lstStyle/>
           <a:p>
             <a:r>
-              <a:rPr lang="en-US" dirty="0"/>
+              <a:rPr lang="ar-SA" dirty="0">
+                <a:latin typeface="Amiri" pitchFamily="2" charset="-78"/>
+                <a:ea typeface="Amiri" pitchFamily="2" charset="-78"/>
+                <a:cs typeface="Amiri" pitchFamily="2" charset="-78"/>
+              </a:rPr>
               <a:t>WELCOME (1 min) — while students join.
 • Greet each student by name as they arrive: السَّلَامُ عَلَيْكُمْ. Take the register (Pastoral Tracker: attendance 0/1).
 • 2-MINUTE CHECK-IN (SEND training): a private chat to any student who seemed unsettled last lesson — “Are you okay today? 👍 / 👎”.
@@ -1958,7 +1978,11 @@
           <a:lstStyle/>
           <a:p>
             <a:r>
-              <a:rPr lang="en-US" dirty="0"/>
+              <a:rPr lang="ar-SA" dirty="0">
+                <a:latin typeface="Amiri" pitchFamily="2" charset="-78"/>
+                <a:ea typeface="Amiri" pitchFamily="2" charset="-78"/>
+                <a:cs typeface="Amiri" pitchFamily="2" charset="-78"/>
+              </a:rPr>
               <a:t>WRITING TASK 2 (website): 80–100 words — meals and favourite food, a justified opinion, at least two health habits, one improvement target and advice to another student.
 Suggested strands (as in F3 and F4): task completion · range · accuracy. The F5-L11 website model article (طَعَامِي وَصِحَّتِي) is the full-mark exemplar — show it ONLY after writing.</a:t>
             </a:r>
@@ -2047,7 +2071,11 @@
           <a:lstStyle/>
           <a:p>
             <a:r>
-              <a:rPr lang="en-US" dirty="0"/>
+              <a:rPr lang="ar-SA" dirty="0">
+                <a:latin typeface="Amiri" pitchFamily="2" charset="-78"/>
+                <a:ea typeface="Amiri" pitchFamily="2" charset="-78"/>
+                <a:cs typeface="Amiri" pitchFamily="2" charset="-78"/>
+              </a:rPr>
               <a:t>SPEAKING (website, 15 marks). Website follow-up questions: مَا طَعَامُكَ المُفَضَّلُ؟ وَلِمَاذَا؟ · مَاذَا تَأْكُلُ وَتَشْرَبُ فِي الفُطُورِ؟ · كَيْفَ تُحَافِظُ عَلَى صِحَّتِكَ؟ · مَتَى ذَهَبْتَ إِلَى الطَّبِيبِ آخِرَ مَرَّةٍ؟ · مَا العَادَةُ الَّتِي تُرِيدُ أَنْ تُحَسِّنَهَا؟
 To a girl: طَعَامُكِ، تَأْكُلِينَ وَتَشْرَبِينَ، تُحَافِظِينَ، ذَهَبْتِ، تُرِيدِينَ.
 ORGANISATION: one-to-one with the teacher while others finish writing, or trusted pairs with the teacher listening (teacher plays the waiter / doctor).</a:t>
@@ -2764,7 +2792,11 @@
           <a:lstStyle/>
           <a:p>
             <a:r>
-              <a:rPr lang="en-US" dirty="0"/>
+              <a:rPr lang="ar-SA" dirty="0">
+                <a:latin typeface="Amiri" pitchFamily="2" charset="-78"/>
+                <a:ea typeface="Amiri" pitchFamily="2" charset="-78"/>
+                <a:cs typeface="Amiri" pitchFamily="2" charset="-78"/>
+              </a:rPr>
               <a:t>REVIEW (website “F5 grammar and sentence-building review”): Present-tense communication (آكُلُ · أَشْرَبُ · أُفَضِّلُ · أَتَنَاوَلُ; تُـ for you/she, يُـ for he) · Reasons and agreement · Symptoms and duration · Advice with أَنْ.
 Website sentence builders (correct choices): أُفَضِّلُ السَّلَطَةَ لِأَنَّهَا صِحِّيَّةٌ. · عِنْدِي أَلَمٌ فِي مَعِدَتِي مُنْذُ يَوْمَيْنِ. · مِنَ الأَفْضَلِ أَنْ تَشْرَبَ المَاءَ بِانْتِظَامٍ.
 The website language vault (all F5 vocabulary by lesson) is for revision BEFORE the assessment — close it during each section.</a:t>
@@ -2942,7 +2974,11 @@
           <a:lstStyle/>
           <a:p>
             <a:r>
-              <a:rPr lang="en-US" dirty="0"/>
+              <a:rPr lang="ar-SA" dirty="0">
+                <a:latin typeface="Amiri" pitchFamily="2" charset="-78"/>
+                <a:ea typeface="Amiri" pitchFamily="2" charset="-78"/>
+                <a:cs typeface="Amiri" pitchFamily="2" charset="-78"/>
+              </a:rPr>
               <a:t>LISTENING TEXT 1 (website, 5 marks). Read twice at natural pace (website: each recording may be played twice); students answer after the second reading.
 SCRIPT: اِسْمِي مَرْيَمُ، وَأُحَاوِلُ أَنْ أَتَنَاوَلَ طَعَامًا مُتَوَازِنًا. فِي الفُطُورِ آكُلُ الزَّبَادِي وَالفَاكِهَةَ وَقِطْعَةً مِنَ الخُبْزِ، وَأَشْرَبُ كُوبًا مِنَ الحَلِيبِ. لَا أَشْرَبُ المَشْرُوبَاتِ الغَازِيَّةَ لِأَنَّهَا تَحْتَوِي عَلَى سُكَّرٍ كَثِيرٍ. فِي الغَدَاءِ آكُلُ الدَّجَاجَ مَعَ الأَرُزِّ وَالسَّلَطَةِ. أَشْرَبُ المَاءَ، وَلَكِنَّ هَدَفِي أَنْ أَزِيدَ كَمِّيَّةَ المَاءِ الَّتِي أَشْرَبُهَا كُلَّ يَوْمٍ.
 Private chat: five letters.</a:t>
@@ -3516,6 +3552,7 @@
                   <a:srgbClr val="D4AF37"/>
                 </a:solidFill>
                 <a:latin typeface="Amiri" pitchFamily="2" charset="-78"/>
+                <a:ea typeface="Amiri" pitchFamily="2" charset="-78"/>
                 <a:cs typeface="Amiri" pitchFamily="2" charset="-78"/>
               </a:rPr>
               <a:t>م</a:t>
@@ -3722,6 +3759,7 @@
                   <a:srgbClr val="D4AF37"/>
                 </a:solidFill>
                 <a:latin typeface="Amiri" pitchFamily="2" charset="-78"/>
+                <a:ea typeface="Amiri" pitchFamily="2" charset="-78"/>
                 <a:cs typeface="Amiri" pitchFamily="2" charset="-78"/>
               </a:rPr>
               <a:t>المُرَاجَعَةُ وَتَقْيِيمُ الوَحْدَةِ</a:t>
@@ -4179,6 +4217,7 @@
                   <a:srgbClr val="D4AF37"/>
                 </a:solidFill>
                 <a:latin typeface="Amiri" pitchFamily="2" charset="-78"/>
+                <a:ea typeface="Amiri" pitchFamily="2" charset="-78"/>
                 <a:cs typeface="Amiri" pitchFamily="2" charset="-78"/>
               </a:rPr>
               <a:t>م</a:t>
@@ -4499,6 +4538,7 @@
                   <a:srgbClr val="8A6D1E"/>
                 </a:solidFill>
                 <a:latin typeface="Amiri" pitchFamily="2" charset="-78"/>
+                <a:ea typeface="Amiri" pitchFamily="2" charset="-78"/>
                 <a:cs typeface="Amiri" pitchFamily="2" charset="-78"/>
               </a:rPr>
               <a:t>الاِسْتِمَاعُ · النَّصُّ الثَّانِي</a:t>
@@ -6860,6 +6900,7 @@
                   <a:srgbClr val="D4AF37"/>
                 </a:solidFill>
                 <a:latin typeface="Amiri" pitchFamily="2" charset="-78"/>
+                <a:ea typeface="Amiri" pitchFamily="2" charset="-78"/>
                 <a:cs typeface="Amiri" pitchFamily="2" charset="-78"/>
               </a:rPr>
               <a:t>م</a:t>
@@ -7180,6 +7221,7 @@
                   <a:srgbClr val="8A6D1E"/>
                 </a:solidFill>
                 <a:latin typeface="Amiri" pitchFamily="2" charset="-78"/>
+                <a:ea typeface="Amiri" pitchFamily="2" charset="-78"/>
                 <a:cs typeface="Amiri" pitchFamily="2" charset="-78"/>
               </a:rPr>
               <a:t>الإِجَابَاتُ</a:t>
@@ -7721,6 +7763,7 @@
                   <a:srgbClr val="8A6D1E"/>
                 </a:solidFill>
                 <a:latin typeface="Amiri" pitchFamily="2" charset="-78"/>
+                <a:ea typeface="Amiri" pitchFamily="2" charset="-78"/>
                 <a:cs typeface="Amiri" pitchFamily="2" charset="-78"/>
               </a:rPr>
               <a:t>أَلَمٌ شَدِيدٌ فِي مَعِدَتِي</a:t>
@@ -8224,6 +8267,7 @@
                   <a:srgbClr val="8A6D1E"/>
                 </a:solidFill>
                 <a:latin typeface="Amiri" pitchFamily="2" charset="-78"/>
+                <a:ea typeface="Amiri" pitchFamily="2" charset="-78"/>
                 <a:cs typeface="Amiri" pitchFamily="2" charset="-78"/>
               </a:rPr>
               <a:t>مُنْذُ يَوْمَيْنِ</a:t>
@@ -8727,6 +8771,7 @@
                   <a:srgbClr val="8A6D1E"/>
                 </a:solidFill>
                 <a:latin typeface="Amiri" pitchFamily="2" charset="-78"/>
+                <a:ea typeface="Amiri" pitchFamily="2" charset="-78"/>
                 <a:cs typeface="Amiri" pitchFamily="2" charset="-78"/>
               </a:rPr>
               <a:t>حُمَّى خَفِيفَةٌ</a:t>
@@ -9230,6 +9275,7 @@
                   <a:srgbClr val="8A6D1E"/>
                 </a:solidFill>
                 <a:latin typeface="Amiri" pitchFamily="2" charset="-78"/>
+                <a:ea typeface="Amiri" pitchFamily="2" charset="-78"/>
                 <a:cs typeface="Amiri" pitchFamily="2" charset="-78"/>
               </a:rPr>
               <a:t>لَا تَأْكُلْ طَعَامًا دَسِمًا</a:t>
@@ -9733,6 +9779,7 @@
                   <a:srgbClr val="8A6D1E"/>
                 </a:solidFill>
                 <a:latin typeface="Amiri" pitchFamily="2" charset="-78"/>
+                <a:ea typeface="Amiri" pitchFamily="2" charset="-78"/>
                 <a:cs typeface="Amiri" pitchFamily="2" charset="-78"/>
               </a:rPr>
               <a:t>إِذَا اسْتَمَرَّ الأَلَمُ</a:t>
@@ -9866,6 +9913,7 @@
                   <a:srgbClr val="D4AF37"/>
                 </a:solidFill>
                 <a:latin typeface="Amiri" pitchFamily="2" charset="-78"/>
+                <a:ea typeface="Amiri" pitchFamily="2" charset="-78"/>
                 <a:cs typeface="Amiri" pitchFamily="2" charset="-78"/>
               </a:rPr>
               <a:t>م</a:t>
@@ -10186,6 +10234,7 @@
                   <a:srgbClr val="8A6D1E"/>
                 </a:solidFill>
                 <a:latin typeface="Amiri" pitchFamily="2" charset="-78"/>
+                <a:ea typeface="Amiri" pitchFamily="2" charset="-78"/>
                 <a:cs typeface="Amiri" pitchFamily="2" charset="-78"/>
               </a:rPr>
               <a:t>الاِسْتِمَاعُ · النَّصُّ الثَّالِثُ</a:t>
@@ -12547,6 +12596,7 @@
                   <a:srgbClr val="D4AF37"/>
                 </a:solidFill>
                 <a:latin typeface="Amiri" pitchFamily="2" charset="-78"/>
+                <a:ea typeface="Amiri" pitchFamily="2" charset="-78"/>
                 <a:cs typeface="Amiri" pitchFamily="2" charset="-78"/>
               </a:rPr>
               <a:t>م</a:t>
@@ -12867,6 +12917,7 @@
                   <a:srgbClr val="8A6D1E"/>
                 </a:solidFill>
                 <a:latin typeface="Amiri" pitchFamily="2" charset="-78"/>
+                <a:ea typeface="Amiri" pitchFamily="2" charset="-78"/>
                 <a:cs typeface="Amiri" pitchFamily="2" charset="-78"/>
               </a:rPr>
               <a:t>الإِجَابَاتُ</a:t>
@@ -13408,6 +13459,7 @@
                   <a:srgbClr val="8A6D1E"/>
                 </a:solidFill>
                 <a:latin typeface="Amiri" pitchFamily="2" charset="-78"/>
+                <a:ea typeface="Amiri" pitchFamily="2" charset="-78"/>
                 <a:cs typeface="Amiri" pitchFamily="2" charset="-78"/>
               </a:rPr>
               <a:t>أُرِيدُ طَبَقَ الكَبْسَةِ</a:t>
@@ -13911,6 +13963,7 @@
                   <a:srgbClr val="8A6D1E"/>
                 </a:solidFill>
                 <a:latin typeface="Amiri" pitchFamily="2" charset="-78"/>
+                <a:ea typeface="Amiri" pitchFamily="2" charset="-78"/>
                 <a:cs typeface="Amiri" pitchFamily="2" charset="-78"/>
               </a:rPr>
               <a:t>الأَرُزِّ وَالدَّجَاجِ وَالتَّوَابِلِ</a:t>
@@ -14414,6 +14467,7 @@
                   <a:srgbClr val="8A6D1E"/>
                 </a:solidFill>
                 <a:latin typeface="Amiri" pitchFamily="2" charset="-78"/>
+                <a:ea typeface="Amiri" pitchFamily="2" charset="-78"/>
                 <a:cs typeface="Amiri" pitchFamily="2" charset="-78"/>
               </a:rPr>
               <a:t>سَلَطَةً صَغِيرَةً</a:t>
@@ -14917,6 +14971,7 @@
                   <a:srgbClr val="8A6D1E"/>
                 </a:solidFill>
                 <a:latin typeface="Amiri" pitchFamily="2" charset="-78"/>
+                <a:ea typeface="Amiri" pitchFamily="2" charset="-78"/>
                 <a:cs typeface="Amiri" pitchFamily="2" charset="-78"/>
               </a:rPr>
               <a:t>عَصِيرَ اللَّيْمُونِ</a:t>
@@ -15420,6 +15475,7 @@
                   <a:srgbClr val="8A6D1E"/>
                 </a:solidFill>
                 <a:latin typeface="Amiri" pitchFamily="2" charset="-78"/>
+                <a:ea typeface="Amiri" pitchFamily="2" charset="-78"/>
                 <a:cs typeface="Amiri" pitchFamily="2" charset="-78"/>
               </a:rPr>
               <a:t>الحِسَابُ، لَوْ سَمَحْتَ</a:t>
@@ -15553,6 +15609,7 @@
                   <a:srgbClr val="D4AF37"/>
                 </a:solidFill>
                 <a:latin typeface="Amiri" pitchFamily="2" charset="-78"/>
+                <a:ea typeface="Amiri" pitchFamily="2" charset="-78"/>
                 <a:cs typeface="Amiri" pitchFamily="2" charset="-78"/>
               </a:rPr>
               <a:t>م</a:t>
@@ -15873,6 +15930,7 @@
                   <a:srgbClr val="8A6D1E"/>
                 </a:solidFill>
                 <a:latin typeface="Amiri" pitchFamily="2" charset="-78"/>
+                <a:ea typeface="Amiri" pitchFamily="2" charset="-78"/>
                 <a:cs typeface="Amiri" pitchFamily="2" charset="-78"/>
               </a:rPr>
               <a:t>قَائِمَةُ مَطْعَمِ الوَاحَةِ</a:t>
@@ -15974,6 +16032,7 @@
                   <a:srgbClr val="FFFFFF"/>
                 </a:solidFill>
                 <a:latin typeface="Amiri" pitchFamily="2" charset="-78"/>
+                <a:ea typeface="Amiri" pitchFamily="2" charset="-78"/>
                 <a:cs typeface="Amiri" pitchFamily="2" charset="-78"/>
               </a:rPr>
               <a:t>الطَّبَقُ</a:t>
@@ -16012,6 +16071,7 @@
                   <a:srgbClr val="FFFFFF"/>
                 </a:solidFill>
                 <a:latin typeface="Amiri" pitchFamily="2" charset="-78"/>
+                <a:ea typeface="Amiri" pitchFamily="2" charset="-78"/>
                 <a:cs typeface="Amiri" pitchFamily="2" charset="-78"/>
               </a:rPr>
               <a:t>السِّعْرُ</a:t>
@@ -16077,6 +16137,7 @@
                   <a:srgbClr val="1B3B6F"/>
                 </a:solidFill>
                 <a:latin typeface="Amiri" pitchFamily="2" charset="-78"/>
+                <a:ea typeface="Amiri" pitchFamily="2" charset="-78"/>
                 <a:cs typeface="Amiri" pitchFamily="2" charset="-78"/>
               </a:rPr>
               <a:t>حَسَاءُ العَدَسِ مَعَ الخُبْزِ (نَبَاتِيٌّ)</a:t>
@@ -16115,6 +16176,7 @@
                   <a:srgbClr val="1B3B6F"/>
                 </a:solidFill>
                 <a:latin typeface="Amiri" pitchFamily="2" charset="-78"/>
+                <a:ea typeface="Amiri" pitchFamily="2" charset="-78"/>
                 <a:cs typeface="Amiri" pitchFamily="2" charset="-78"/>
               </a:rPr>
               <a:t>٨ دَنَانِيرَ</a:t>
@@ -16180,6 +16242,7 @@
                   <a:srgbClr val="1B3B6F"/>
                 </a:solidFill>
                 <a:latin typeface="Amiri" pitchFamily="2" charset="-78"/>
+                <a:ea typeface="Amiri" pitchFamily="2" charset="-78"/>
                 <a:cs typeface="Amiri" pitchFamily="2" charset="-78"/>
               </a:rPr>
               <a:t>الدَّجَاجُ مَعَ الأَرُزِّ</a:t>
@@ -16218,6 +16281,7 @@
                   <a:srgbClr val="1B3B6F"/>
                 </a:solidFill>
                 <a:latin typeface="Amiri" pitchFamily="2" charset="-78"/>
+                <a:ea typeface="Amiri" pitchFamily="2" charset="-78"/>
                 <a:cs typeface="Amiri" pitchFamily="2" charset="-78"/>
               </a:rPr>
               <a:t>١٨ دِينَارًا</a:t>
@@ -16283,6 +16347,7 @@
                   <a:srgbClr val="1B3B6F"/>
                 </a:solidFill>
                 <a:latin typeface="Amiri" pitchFamily="2" charset="-78"/>
+                <a:ea typeface="Amiri" pitchFamily="2" charset="-78"/>
                 <a:cs typeface="Amiri" pitchFamily="2" charset="-78"/>
               </a:rPr>
               <a:t>السَّمَكُ المَشْوِيُّ مَعَ البَطَاطِسِ وَالسَّلَطَةِ</a:t>
@@ -16321,6 +16386,7 @@
                   <a:srgbClr val="1B3B6F"/>
                 </a:solidFill>
                 <a:latin typeface="Amiri" pitchFamily="2" charset="-78"/>
+                <a:ea typeface="Amiri" pitchFamily="2" charset="-78"/>
                 <a:cs typeface="Amiri" pitchFamily="2" charset="-78"/>
               </a:rPr>
               <a:t>٢٢ دِينَارًا</a:t>
@@ -16386,6 +16452,7 @@
                   <a:srgbClr val="1B3B6F"/>
                 </a:solidFill>
                 <a:latin typeface="Amiri" pitchFamily="2" charset="-78"/>
+                <a:ea typeface="Amiri" pitchFamily="2" charset="-78"/>
                 <a:cs typeface="Amiri" pitchFamily="2" charset="-78"/>
               </a:rPr>
               <a:t>سَلَطَةُ الفَاكِهَةِ</a:t>
@@ -16424,6 +16491,7 @@
                   <a:srgbClr val="1B3B6F"/>
                 </a:solidFill>
                 <a:latin typeface="Amiri" pitchFamily="2" charset="-78"/>
+                <a:ea typeface="Amiri" pitchFamily="2" charset="-78"/>
                 <a:cs typeface="Amiri" pitchFamily="2" charset="-78"/>
               </a:rPr>
               <a:t>٧ دَنَانِيرَ</a:t>
@@ -16489,6 +16557,7 @@
                   <a:srgbClr val="1B3B6F"/>
                 </a:solidFill>
                 <a:latin typeface="Amiri" pitchFamily="2" charset="-78"/>
+                <a:ea typeface="Amiri" pitchFamily="2" charset="-78"/>
                 <a:cs typeface="Amiri" pitchFamily="2" charset="-78"/>
               </a:rPr>
               <a:t>شَايٌ · مَاءٌ مَعْدِنِيٌّ · عَصِيرُ بُرْتُقَالٍ</a:t>
@@ -16527,6 +16596,7 @@
                   <a:srgbClr val="1B3B6F"/>
                 </a:solidFill>
                 <a:latin typeface="Amiri" pitchFamily="2" charset="-78"/>
+                <a:ea typeface="Amiri" pitchFamily="2" charset="-78"/>
                 <a:cs typeface="Amiri" pitchFamily="2" charset="-78"/>
               </a:rPr>
               <a:t>٣ · ٤ · ٦</a:t>
@@ -16660,6 +16730,7 @@
                   <a:srgbClr val="D4AF37"/>
                 </a:solidFill>
                 <a:latin typeface="Amiri" pitchFamily="2" charset="-78"/>
+                <a:ea typeface="Amiri" pitchFamily="2" charset="-78"/>
                 <a:cs typeface="Amiri" pitchFamily="2" charset="-78"/>
               </a:rPr>
               <a:t>م</a:t>
@@ -16980,6 +17051,7 @@
                   <a:srgbClr val="8A6D1E"/>
                 </a:solidFill>
                 <a:latin typeface="Amiri" pitchFamily="2" charset="-78"/>
+                <a:ea typeface="Amiri" pitchFamily="2" charset="-78"/>
                 <a:cs typeface="Amiri" pitchFamily="2" charset="-78"/>
               </a:rPr>
               <a:t>أَسْئِلَةُ القِرَاءَةِ</a:t>
@@ -19341,6 +19413,7 @@
                   <a:srgbClr val="D4AF37"/>
                 </a:solidFill>
                 <a:latin typeface="Amiri" pitchFamily="2" charset="-78"/>
+                <a:ea typeface="Amiri" pitchFamily="2" charset="-78"/>
                 <a:cs typeface="Amiri" pitchFamily="2" charset="-78"/>
               </a:rPr>
               <a:t>م</a:t>
@@ -19661,6 +19734,7 @@
                   <a:srgbClr val="8A6D1E"/>
                 </a:solidFill>
                 <a:latin typeface="Amiri" pitchFamily="2" charset="-78"/>
+                <a:ea typeface="Amiri" pitchFamily="2" charset="-78"/>
                 <a:cs typeface="Amiri" pitchFamily="2" charset="-78"/>
               </a:rPr>
               <a:t>الإِجَابَاتُ</a:t>
@@ -20202,6 +20276,7 @@
                   <a:srgbClr val="8A6D1E"/>
                 </a:solidFill>
                 <a:latin typeface="Amiri" pitchFamily="2" charset="-78"/>
+                <a:ea typeface="Amiri" pitchFamily="2" charset="-78"/>
                 <a:cs typeface="Amiri" pitchFamily="2" charset="-78"/>
               </a:rPr>
               <a:t>حَسَاءُ العَدَسِ مَعَ الخُبْزِ (نَبَاتِيٌّ)</a:t>
@@ -20705,6 +20780,7 @@
                   <a:srgbClr val="8A6D1E"/>
                 </a:solidFill>
                 <a:latin typeface="Amiri" pitchFamily="2" charset="-78"/>
+                <a:ea typeface="Amiri" pitchFamily="2" charset="-78"/>
                 <a:cs typeface="Amiri" pitchFamily="2" charset="-78"/>
               </a:rPr>
               <a:t>الدَّجَاجُ مَعَ الأَرُزِّ: ١٨</a:t>
@@ -21208,6 +21284,7 @@
                   <a:srgbClr val="8A6D1E"/>
                 </a:solidFill>
                 <a:latin typeface="Amiri" pitchFamily="2" charset="-78"/>
+                <a:ea typeface="Amiri" pitchFamily="2" charset="-78"/>
                 <a:cs typeface="Amiri" pitchFamily="2" charset="-78"/>
               </a:rPr>
               <a:t>مَعَ البَطَاطِسِ وَالسَّلَطَةِ</a:t>
@@ -21711,6 +21788,7 @@
                   <a:srgbClr val="8A6D1E"/>
                 </a:solidFill>
                 <a:latin typeface="Amiri" pitchFamily="2" charset="-78"/>
+                <a:ea typeface="Amiri" pitchFamily="2" charset="-78"/>
                 <a:cs typeface="Amiri" pitchFamily="2" charset="-78"/>
               </a:rPr>
               <a:t>شَايٌ: ٣</a:t>
@@ -22214,6 +22292,7 @@
                   <a:srgbClr val="8A6D1E"/>
                 </a:solidFill>
                 <a:latin typeface="Amiri" pitchFamily="2" charset="-78"/>
+                <a:ea typeface="Amiri" pitchFamily="2" charset="-78"/>
                 <a:cs typeface="Amiri" pitchFamily="2" charset="-78"/>
               </a:rPr>
               <a:t>سَلَطَةُ الفَاكِهَةِ</a:t>
@@ -22347,6 +22426,7 @@
                   <a:srgbClr val="D4AF37"/>
                 </a:solidFill>
                 <a:latin typeface="Amiri" pitchFamily="2" charset="-78"/>
+                <a:ea typeface="Amiri" pitchFamily="2" charset="-78"/>
                 <a:cs typeface="Amiri" pitchFamily="2" charset="-78"/>
               </a:rPr>
               <a:t>م</a:t>
@@ -22667,6 +22747,7 @@
                   <a:srgbClr val="8A6D1E"/>
                 </a:solidFill>
                 <a:latin typeface="Amiri" pitchFamily="2" charset="-78"/>
+                <a:ea typeface="Amiri" pitchFamily="2" charset="-78"/>
                 <a:cs typeface="Amiri" pitchFamily="2" charset="-78"/>
               </a:rPr>
               <a:t>عَادَاتٌ صِحِّيَّةٌ لِلطُّلَّابِ</a:t>
@@ -22780,6 +22861,7 @@
                   <a:srgbClr val="1F2A37"/>
                 </a:solidFill>
                 <a:latin typeface="Amiri" pitchFamily="2" charset="-78"/>
+                <a:ea typeface="Amiri" pitchFamily="2" charset="-78"/>
                 <a:cs typeface="Amiri" pitchFamily="2" charset="-78"/>
               </a:rPr>
               <a:t>عَادَاتٌ صِحِّيَّةٌ لِلطُّلَّابِ · تَعْتَمِدُ الصِّحَّةُ عَلَى عَادَاتٍ يَوْمِيَّةٍ مُتَوَازِنَةٍ. يَنْبَغِي أَنْ نَأْكُلَ خَمْسَ حِصَصٍ مِنَ الفَاكِهَةِ وَالخَضْرَوَاتِ، وَأَنْ نَشْرَبَ المَاءَ بِانْتِظَامٍ. مِنَ الأَفْضَلِ أَنْ نُقَلِّلَ المَشْرُوبَاتِ السُّكَّرِيَّةَ لِأَنَّهَا قَدْ تَضُرُّ الأَسْنَانَ وَالجِسْمَ. كَمَا يَجِبُ أَنْ نَنَامَ مُبَكِّرًا وَنُمَارِسَ الرِّيَاضَةَ. قَبْلَ النَّوْمِ، اِسْتَرِحْ وَلَا تَسْتَخْدِمِ الهَاتِفَ لِسَاعَاتٍ طَوِيلَةٍ. لِذَلِكَ، اِبْنِ عَادَاتٍ صَغِيرَةً وَثَابِتَةً.</a:t>
@@ -22913,6 +22995,7 @@
                   <a:srgbClr val="D4AF37"/>
                 </a:solidFill>
                 <a:latin typeface="Amiri" pitchFamily="2" charset="-78"/>
+                <a:ea typeface="Amiri" pitchFamily="2" charset="-78"/>
                 <a:cs typeface="Amiri" pitchFamily="2" charset="-78"/>
               </a:rPr>
               <a:t>م</a:t>
@@ -23233,6 +23316,7 @@
                   <a:srgbClr val="8A6D1E"/>
                 </a:solidFill>
                 <a:latin typeface="Amiri" pitchFamily="2" charset="-78"/>
+                <a:ea typeface="Amiri" pitchFamily="2" charset="-78"/>
                 <a:cs typeface="Amiri" pitchFamily="2" charset="-78"/>
               </a:rPr>
               <a:t>أَسْئِلَةُ القِرَاءَةِ</a:t>
@@ -25259,6 +25343,7 @@
                   <a:srgbClr val="1F2A37"/>
                 </a:solidFill>
                 <a:latin typeface="Amiri" pitchFamily="2" charset="-78"/>
+                <a:ea typeface="Amiri" pitchFamily="2" charset="-78"/>
                 <a:cs typeface="Amiri" pitchFamily="2" charset="-78"/>
               </a:rPr>
               <a:t>لِذَلِكَ</a:t>
@@ -25360,6 +25445,7 @@
                   <a:srgbClr val="1F2A37"/>
                 </a:solidFill>
                 <a:latin typeface="Amiri" pitchFamily="2" charset="-78"/>
+                <a:ea typeface="Amiri" pitchFamily="2" charset="-78"/>
                 <a:cs typeface="Amiri" pitchFamily="2" charset="-78"/>
               </a:rPr>
               <a:t>أَيْضًا</a:t>
@@ -25461,6 +25547,7 @@
                   <a:srgbClr val="1F2A37"/>
                 </a:solidFill>
                 <a:latin typeface="Amiri" pitchFamily="2" charset="-78"/>
+                <a:ea typeface="Amiri" pitchFamily="2" charset="-78"/>
                 <a:cs typeface="Amiri" pitchFamily="2" charset="-78"/>
               </a:rPr>
               <a:t>لِأَنَّ</a:t>
@@ -25594,6 +25681,7 @@
                   <a:srgbClr val="D4AF37"/>
                 </a:solidFill>
                 <a:latin typeface="Amiri" pitchFamily="2" charset="-78"/>
+                <a:ea typeface="Amiri" pitchFamily="2" charset="-78"/>
                 <a:cs typeface="Amiri" pitchFamily="2" charset="-78"/>
               </a:rPr>
               <a:t>م</a:t>
@@ -25914,6 +26002,7 @@
                   <a:srgbClr val="8A6D1E"/>
                 </a:solidFill>
                 <a:latin typeface="Amiri" pitchFamily="2" charset="-78"/>
+                <a:ea typeface="Amiri" pitchFamily="2" charset="-78"/>
                 <a:cs typeface="Amiri" pitchFamily="2" charset="-78"/>
               </a:rPr>
               <a:t>الإِجَابَاتُ</a:t>
@@ -26455,6 +26544,7 @@
                   <a:srgbClr val="8A6D1E"/>
                 </a:solidFill>
                 <a:latin typeface="Amiri" pitchFamily="2" charset="-78"/>
+                <a:ea typeface="Amiri" pitchFamily="2" charset="-78"/>
                 <a:cs typeface="Amiri" pitchFamily="2" charset="-78"/>
               </a:rPr>
               <a:t>تَعْتَمِدُ الصِّحَّةُ عَلَى عَادَاتٍ يَوْمِيَّةٍ مُتَوَازِنَةٍ</a:t>
@@ -26958,6 +27048,7 @@
                   <a:srgbClr val="8A6D1E"/>
                 </a:solidFill>
                 <a:latin typeface="Amiri" pitchFamily="2" charset="-78"/>
+                <a:ea typeface="Amiri" pitchFamily="2" charset="-78"/>
                 <a:cs typeface="Amiri" pitchFamily="2" charset="-78"/>
               </a:rPr>
               <a:t>خَمْسَ حِصَصٍ</a:t>
@@ -27461,6 +27552,7 @@
                   <a:srgbClr val="8A6D1E"/>
                 </a:solidFill>
                 <a:latin typeface="Amiri" pitchFamily="2" charset="-78"/>
+                <a:ea typeface="Amiri" pitchFamily="2" charset="-78"/>
                 <a:cs typeface="Amiri" pitchFamily="2" charset="-78"/>
               </a:rPr>
               <a:t>قَدْ تَضُرُّ الأَسْنَانَ وَالجِسْمَ</a:t>
@@ -27964,6 +28056,7 @@
                   <a:srgbClr val="8A6D1E"/>
                 </a:solidFill>
                 <a:latin typeface="Amiri" pitchFamily="2" charset="-78"/>
+                <a:ea typeface="Amiri" pitchFamily="2" charset="-78"/>
                 <a:cs typeface="Amiri" pitchFamily="2" charset="-78"/>
               </a:rPr>
               <a:t>اِسْتَرِحْ وَلَا تَسْتَخْدِمِ الهَاتِفَ</a:t>
@@ -28227,6 +28320,7 @@
                   <a:srgbClr val="1F2A37"/>
                 </a:solidFill>
                 <a:latin typeface="Amiri" pitchFamily="2" charset="-78"/>
+                <a:ea typeface="Amiri" pitchFamily="2" charset="-78"/>
                 <a:cs typeface="Amiri" pitchFamily="2" charset="-78"/>
               </a:rPr>
               <a:t>لِذَلِكَ</a:t>
@@ -28328,6 +28422,7 @@
                   <a:srgbClr val="9AA1AB"/>
                 </a:solidFill>
                 <a:latin typeface="Amiri" pitchFamily="2" charset="-78"/>
+                <a:ea typeface="Amiri" pitchFamily="2" charset="-78"/>
                 <a:cs typeface="Amiri" pitchFamily="2" charset="-78"/>
               </a:rPr>
               <a:t>أَيْضًا</a:t>
@@ -28429,6 +28524,7 @@
                   <a:srgbClr val="9AA1AB"/>
                 </a:solidFill>
                 <a:latin typeface="Amiri" pitchFamily="2" charset="-78"/>
+                <a:ea typeface="Amiri" pitchFamily="2" charset="-78"/>
                 <a:cs typeface="Amiri" pitchFamily="2" charset="-78"/>
               </a:rPr>
               <a:t>لِأَنَّ</a:t>
@@ -28467,6 +28563,7 @@
                   <a:srgbClr val="8A6D1E"/>
                 </a:solidFill>
                 <a:latin typeface="Amiri" pitchFamily="2" charset="-78"/>
+                <a:ea typeface="Amiri" pitchFamily="2" charset="-78"/>
                 <a:cs typeface="Amiri" pitchFamily="2" charset="-78"/>
               </a:rPr>
               <a:t>لِذَلِكَ، اِبْنِ عَادَاتٍ صَغِيرَةً</a:t>
@@ -28600,6 +28697,7 @@
                   <a:srgbClr val="D4AF37"/>
                 </a:solidFill>
                 <a:latin typeface="Amiri" pitchFamily="2" charset="-78"/>
+                <a:ea typeface="Amiri" pitchFamily="2" charset="-78"/>
                 <a:cs typeface="Amiri" pitchFamily="2" charset="-78"/>
               </a:rPr>
               <a:t>م</a:t>
@@ -28920,6 +29018,7 @@
                   <a:srgbClr val="8A6D1E"/>
                 </a:solidFill>
                 <a:latin typeface="Amiri" pitchFamily="2" charset="-78"/>
+                <a:ea typeface="Amiri" pitchFamily="2" charset="-78"/>
                 <a:cs typeface="Amiri" pitchFamily="2" charset="-78"/>
               </a:rPr>
               <a:t>آدَابُ الصَّفِّ</a:t>
@@ -30451,6 +30550,7 @@
                   <a:srgbClr val="D4AF37"/>
                 </a:solidFill>
                 <a:latin typeface="Amiri" pitchFamily="2" charset="-78"/>
+                <a:ea typeface="Amiri" pitchFamily="2" charset="-78"/>
                 <a:cs typeface="Amiri" pitchFamily="2" charset="-78"/>
               </a:rPr>
               <a:t>م</a:t>
@@ -30771,6 +30871,7 @@
                   <a:srgbClr val="8A6D1E"/>
                 </a:solidFill>
                 <a:latin typeface="Amiri" pitchFamily="2" charset="-78"/>
+                <a:ea typeface="Amiri" pitchFamily="2" charset="-78"/>
                 <a:cs typeface="Amiri" pitchFamily="2" charset="-78"/>
               </a:rPr>
               <a:t>تَعْلِيمَاتُ الصَّيْدَلِيَّةِ</a:t>
@@ -30884,6 +30985,7 @@
                   <a:srgbClr val="1F2A37"/>
                 </a:solidFill>
                 <a:latin typeface="Amiri" pitchFamily="2" charset="-78"/>
+                <a:ea typeface="Amiri" pitchFamily="2" charset="-78"/>
                 <a:cs typeface="Amiri" pitchFamily="2" charset="-78"/>
               </a:rPr>
               <a:t>تَعْلِيمَاتُ الصَّيْدَلِيَّةِ · خُذْ هٰذَا الدَّوَاءَ مَرَّتَيْنِ فِي اليَوْمِ بَعْدَ الطَّعَامِ. لَا تَزِدِ الجُرْعَةَ. إِذَا ظَهَرَتْ حَسَاسِيَّةٌ، تَوَقَّفْ عَنِ الدَّوَاءِ وَاتَّصِلْ بِالطَّبِيبِ. اِحْفَظِ الدَّوَاءَ فِي مَكَانٍ بَارِدٍ وَجَافٍّ، بَعِيدًا عَنِ الأَطْفَالِ.</a:t>
@@ -31017,6 +31119,7 @@
                   <a:srgbClr val="D4AF37"/>
                 </a:solidFill>
                 <a:latin typeface="Amiri" pitchFamily="2" charset="-78"/>
+                <a:ea typeface="Amiri" pitchFamily="2" charset="-78"/>
                 <a:cs typeface="Amiri" pitchFamily="2" charset="-78"/>
               </a:rPr>
               <a:t>م</a:t>
@@ -31337,6 +31440,7 @@
                   <a:srgbClr val="8A6D1E"/>
                 </a:solidFill>
                 <a:latin typeface="Amiri" pitchFamily="2" charset="-78"/>
+                <a:ea typeface="Amiri" pitchFamily="2" charset="-78"/>
                 <a:cs typeface="Amiri" pitchFamily="2" charset="-78"/>
               </a:rPr>
               <a:t>أَسْئِلَةُ القِرَاءَةِ</a:t>
@@ -33698,6 +33802,7 @@
                   <a:srgbClr val="D4AF37"/>
                 </a:solidFill>
                 <a:latin typeface="Amiri" pitchFamily="2" charset="-78"/>
+                <a:ea typeface="Amiri" pitchFamily="2" charset="-78"/>
                 <a:cs typeface="Amiri" pitchFamily="2" charset="-78"/>
               </a:rPr>
               <a:t>م</a:t>
@@ -34018,6 +34123,7 @@
                   <a:srgbClr val="8A6D1E"/>
                 </a:solidFill>
                 <a:latin typeface="Amiri" pitchFamily="2" charset="-78"/>
+                <a:ea typeface="Amiri" pitchFamily="2" charset="-78"/>
                 <a:cs typeface="Amiri" pitchFamily="2" charset="-78"/>
               </a:rPr>
               <a:t>الإِجَابَاتُ</a:t>
@@ -34559,6 +34665,7 @@
                   <a:srgbClr val="8A6D1E"/>
                 </a:solidFill>
                 <a:latin typeface="Amiri" pitchFamily="2" charset="-78"/>
+                <a:ea typeface="Amiri" pitchFamily="2" charset="-78"/>
                 <a:cs typeface="Amiri" pitchFamily="2" charset="-78"/>
               </a:rPr>
               <a:t>تَعْلِيمَاتُ الصَّيْدَلِيَّةِ</a:t>
@@ -35062,6 +35169,7 @@
                   <a:srgbClr val="8A6D1E"/>
                 </a:solidFill>
                 <a:latin typeface="Amiri" pitchFamily="2" charset="-78"/>
+                <a:ea typeface="Amiri" pitchFamily="2" charset="-78"/>
                 <a:cs typeface="Amiri" pitchFamily="2" charset="-78"/>
               </a:rPr>
               <a:t>مَرَّتَيْنِ فِي اليَوْمِ</a:t>
@@ -35565,6 +35673,7 @@
                   <a:srgbClr val="8A6D1E"/>
                 </a:solidFill>
                 <a:latin typeface="Amiri" pitchFamily="2" charset="-78"/>
+                <a:ea typeface="Amiri" pitchFamily="2" charset="-78"/>
                 <a:cs typeface="Amiri" pitchFamily="2" charset="-78"/>
               </a:rPr>
               <a:t>بَعْدَ الطَّعَامِ</a:t>
@@ -36068,6 +36177,7 @@
                   <a:srgbClr val="8A6D1E"/>
                 </a:solidFill>
                 <a:latin typeface="Amiri" pitchFamily="2" charset="-78"/>
+                <a:ea typeface="Amiri" pitchFamily="2" charset="-78"/>
                 <a:cs typeface="Amiri" pitchFamily="2" charset="-78"/>
               </a:rPr>
               <a:t>تَوَقَّفْ … وَاتَّصِلْ بِالطَّبِيبِ</a:t>
@@ -36571,6 +36681,7 @@
                   <a:srgbClr val="8A6D1E"/>
                 </a:solidFill>
                 <a:latin typeface="Amiri" pitchFamily="2" charset="-78"/>
+                <a:ea typeface="Amiri" pitchFamily="2" charset="-78"/>
                 <a:cs typeface="Amiri" pitchFamily="2" charset="-78"/>
               </a:rPr>
               <a:t>فِي مَكَانٍ بَارِدٍ وَجَافٍّ</a:t>
@@ -36704,6 +36815,7 @@
                   <a:srgbClr val="D4AF37"/>
                 </a:solidFill>
                 <a:latin typeface="Amiri" pitchFamily="2" charset="-78"/>
+                <a:ea typeface="Amiri" pitchFamily="2" charset="-78"/>
                 <a:cs typeface="Amiri" pitchFamily="2" charset="-78"/>
               </a:rPr>
               <a:t>م</a:t>
@@ -37024,6 +37136,7 @@
                   <a:srgbClr val="8A6D1E"/>
                 </a:solidFill>
                 <a:latin typeface="Amiri" pitchFamily="2" charset="-78"/>
+                <a:ea typeface="Amiri" pitchFamily="2" charset="-78"/>
                 <a:cs typeface="Amiri" pitchFamily="2" charset="-78"/>
               </a:rPr>
               <a:t>اِسْتِمَارَةُ العِيَادَةِ</a:t>
@@ -37304,6 +37417,7 @@
                   <a:srgbClr val="1B3B6F"/>
                 </a:solidFill>
                 <a:latin typeface="Amiri" pitchFamily="2" charset="-78"/>
+                <a:ea typeface="Amiri" pitchFamily="2" charset="-78"/>
                 <a:cs typeface="Amiri" pitchFamily="2" charset="-78"/>
               </a:rPr>
               <a:t>العَرَضُ</a:t>
@@ -37510,6 +37624,7 @@
                   <a:srgbClr val="1B3B6F"/>
                 </a:solidFill>
                 <a:latin typeface="Amiri" pitchFamily="2" charset="-78"/>
+                <a:ea typeface="Amiri" pitchFamily="2" charset="-78"/>
                 <a:cs typeface="Amiri" pitchFamily="2" charset="-78"/>
               </a:rPr>
               <a:t>جُزْءُ الجِسْمِ</a:t>
@@ -37716,6 +37831,7 @@
                   <a:srgbClr val="1B3B6F"/>
                 </a:solidFill>
                 <a:latin typeface="Amiri" pitchFamily="2" charset="-78"/>
+                <a:ea typeface="Amiri" pitchFamily="2" charset="-78"/>
                 <a:cs typeface="Amiri" pitchFamily="2" charset="-78"/>
               </a:rPr>
               <a:t>المُدَّةُ</a:t>
@@ -37922,6 +38038,7 @@
                   <a:srgbClr val="1B3B6F"/>
                 </a:solidFill>
                 <a:latin typeface="Amiri" pitchFamily="2" charset="-78"/>
+                <a:ea typeface="Amiri" pitchFamily="2" charset="-78"/>
                 <a:cs typeface="Amiri" pitchFamily="2" charset="-78"/>
               </a:rPr>
               <a:t>عَادَةٌ غِذَائِيَّةٌ</a:t>
@@ -38128,6 +38245,7 @@
                   <a:srgbClr val="1B3B6F"/>
                 </a:solidFill>
                 <a:latin typeface="Amiri" pitchFamily="2" charset="-78"/>
+                <a:ea typeface="Amiri" pitchFamily="2" charset="-78"/>
                 <a:cs typeface="Amiri" pitchFamily="2" charset="-78"/>
               </a:rPr>
               <a:t>النَّصِيحَةُ المَطْلُوبَةُ</a:t>
@@ -38282,6 +38400,7 @@
                   <a:srgbClr val="1B3B6F"/>
                 </a:solidFill>
                 <a:latin typeface="Amiri" pitchFamily="2" charset="-78"/>
+                <a:ea typeface="Amiri" pitchFamily="2" charset="-78"/>
                 <a:cs typeface="Amiri" pitchFamily="2" charset="-78"/>
               </a:rPr>
               <a:t>صُدَاعٌ</a:t>
@@ -38308,6 +38427,7 @@
                   <a:srgbClr val="1B3B6F"/>
                 </a:solidFill>
                 <a:latin typeface="Amiri" pitchFamily="2" charset="-78"/>
+                <a:ea typeface="Amiri" pitchFamily="2" charset="-78"/>
                 <a:cs typeface="Amiri" pitchFamily="2" charset="-78"/>
               </a:rPr>
               <a:t>رَأْسِي</a:t>
@@ -38334,6 +38454,7 @@
                   <a:srgbClr val="1B3B6F"/>
                 </a:solidFill>
                 <a:latin typeface="Amiri" pitchFamily="2" charset="-78"/>
+                <a:ea typeface="Amiri" pitchFamily="2" charset="-78"/>
                 <a:cs typeface="Amiri" pitchFamily="2" charset="-78"/>
               </a:rPr>
               <a:t>مُنْذُ يَوْمَيْنِ</a:t>
@@ -38360,6 +38481,7 @@
                   <a:srgbClr val="1B3B6F"/>
                 </a:solidFill>
                 <a:latin typeface="Amiri" pitchFamily="2" charset="-78"/>
+                <a:ea typeface="Amiri" pitchFamily="2" charset="-78"/>
                 <a:cs typeface="Amiri" pitchFamily="2" charset="-78"/>
               </a:rPr>
               <a:t>أَشْرَبُ قَلِيلًا مِنَ المَاءِ</a:t>
@@ -38386,6 +38508,7 @@
                   <a:srgbClr val="1B3B6F"/>
                 </a:solidFill>
                 <a:latin typeface="Amiri" pitchFamily="2" charset="-78"/>
+                <a:ea typeface="Amiri" pitchFamily="2" charset="-78"/>
                 <a:cs typeface="Amiri" pitchFamily="2" charset="-78"/>
               </a:rPr>
               <a:t>مَاذَا يَجِبُ أَنْ أَفْعَلَ؟</a:t>
@@ -38519,6 +38642,7 @@
                   <a:srgbClr val="D4AF37"/>
                 </a:solidFill>
                 <a:latin typeface="Amiri" pitchFamily="2" charset="-78"/>
+                <a:ea typeface="Amiri" pitchFamily="2" charset="-78"/>
                 <a:cs typeface="Amiri" pitchFamily="2" charset="-78"/>
               </a:rPr>
               <a:t>م</a:t>
@@ -38839,6 +38963,7 @@
                   <a:srgbClr val="8A6D1E"/>
                 </a:solidFill>
                 <a:latin typeface="Amiri" pitchFamily="2" charset="-78"/>
+                <a:ea typeface="Amiri" pitchFamily="2" charset="-78"/>
                 <a:cs typeface="Amiri" pitchFamily="2" charset="-78"/>
               </a:rPr>
               <a:t>طَعَامِي وَصِحَّتِي</a:t>
@@ -39989,6 +40114,7 @@
                   <a:srgbClr val="D4AF37"/>
                 </a:solidFill>
                 <a:latin typeface="Amiri" pitchFamily="2" charset="-78"/>
+                <a:ea typeface="Amiri" pitchFamily="2" charset="-78"/>
                 <a:cs typeface="Amiri" pitchFamily="2" charset="-78"/>
               </a:rPr>
               <a:t>م</a:t>
@@ -40309,6 +40435,7 @@
                   <a:srgbClr val="8A6D1E"/>
                 </a:solidFill>
                 <a:latin typeface="Amiri" pitchFamily="2" charset="-78"/>
+                <a:ea typeface="Amiri" pitchFamily="2" charset="-78"/>
                 <a:cs typeface="Amiri" pitchFamily="2" charset="-78"/>
               </a:rPr>
               <a:t>التَّحَدُّثُ</a:t>
@@ -41275,6 +41402,7 @@
                   <a:srgbClr val="D4AF37"/>
                 </a:solidFill>
                 <a:latin typeface="Amiri" pitchFamily="2" charset="-78"/>
+                <a:ea typeface="Amiri" pitchFamily="2" charset="-78"/>
                 <a:cs typeface="Amiri" pitchFamily="2" charset="-78"/>
               </a:rPr>
               <a:t>م</a:t>
@@ -41595,6 +41723,7 @@
                   <a:srgbClr val="8A6D1E"/>
                 </a:solidFill>
                 <a:latin typeface="Amiri" pitchFamily="2" charset="-78"/>
+                <a:ea typeface="Amiri" pitchFamily="2" charset="-78"/>
                 <a:cs typeface="Amiri" pitchFamily="2" charset="-78"/>
               </a:rPr>
               <a:t>مِلَفُّ المَهَارَاتِ</a:t>
@@ -42767,6 +42896,7 @@
                   <a:srgbClr val="D4AF37"/>
                 </a:solidFill>
                 <a:latin typeface="Amiri" pitchFamily="2" charset="-78"/>
+                <a:ea typeface="Amiri" pitchFamily="2" charset="-78"/>
                 <a:cs typeface="Amiri" pitchFamily="2" charset="-78"/>
               </a:rPr>
               <a:t>م</a:t>
@@ -43087,6 +43217,7 @@
                   <a:srgbClr val="8A6D1E"/>
                 </a:solidFill>
                 <a:latin typeface="Amiri" pitchFamily="2" charset="-78"/>
+                <a:ea typeface="Amiri" pitchFamily="2" charset="-78"/>
                 <a:cs typeface="Amiri" pitchFamily="2" charset="-78"/>
               </a:rPr>
               <a:t>قَيِّمْ عَمَلَكَ</a:t>
@@ -43721,6 +43852,7 @@
                   <a:srgbClr val="1F2A37"/>
                 </a:solidFill>
                 <a:latin typeface="Amiri" pitchFamily="2" charset="-78"/>
+                <a:ea typeface="Amiri" pitchFamily="2" charset="-78"/>
                 <a:cs typeface="Amiri" pitchFamily="2" charset="-78"/>
               </a:rPr>
               <a:t>يَجِبُ أَنْ</a:t>
@@ -44270,6 +44402,7 @@
                   <a:srgbClr val="D4AF37"/>
                 </a:solidFill>
                 <a:latin typeface="Amiri" pitchFamily="2" charset="-78"/>
+                <a:ea typeface="Amiri" pitchFamily="2" charset="-78"/>
                 <a:cs typeface="Amiri" pitchFamily="2" charset="-78"/>
               </a:rPr>
               <a:t>م</a:t>
@@ -44590,6 +44723,7 @@
                   <a:srgbClr val="8A6D1E"/>
                 </a:solidFill>
                 <a:latin typeface="Amiri" pitchFamily="2" charset="-78"/>
+                <a:ea typeface="Amiri" pitchFamily="2" charset="-78"/>
                 <a:cs typeface="Amiri" pitchFamily="2" charset="-78"/>
               </a:rPr>
               <a:t>التَّحْضِيرُ لِلدَّرْسِ القَادِمِ</a:t>
@@ -44803,6 +44937,7 @@
                   <a:srgbClr val="1B3B6F"/>
                 </a:solidFill>
                 <a:latin typeface="Amiri" pitchFamily="2" charset="-78"/>
+                <a:ea typeface="Amiri" pitchFamily="2" charset="-78"/>
                 <a:cs typeface="Amiri" pitchFamily="2" charset="-78"/>
               </a:rPr>
               <a:t>مَدِينَةٌ</a:t>
@@ -44849,11 +44984,12 @@
               <a:buNone/>
             </a:pPr>
             <a:r>
-              <a:rPr lang="en-US" sz="1000" i="1" dirty="0">
+              <a:rPr lang="ar-SA" sz="1000" i="1" dirty="0">
                 <a:solidFill>
                   <a:srgbClr val="5A6472"/>
                 </a:solidFill>
                 <a:latin typeface="Calibri" pitchFamily="34" charset="0"/>
+                <a:ea typeface="Amiri" pitchFamily="2" charset="-78"/>
                 <a:cs typeface="Amiri" pitchFamily="2" charset="-78"/>
               </a:rPr>
               <a:t>  pl. مُدُنٌ</a:t>
@@ -44892,6 +45028,7 @@
                   <a:srgbClr val="1B3B6F"/>
                 </a:solidFill>
                 <a:latin typeface="Amiri" pitchFamily="2" charset="-78"/>
+                <a:ea typeface="Amiri" pitchFamily="2" charset="-78"/>
                 <a:cs typeface="Amiri" pitchFamily="2" charset="-78"/>
               </a:rPr>
               <a:t>شَارِعٌ</a:t>
@@ -44938,11 +45075,12 @@
               <a:buNone/>
             </a:pPr>
             <a:r>
-              <a:rPr lang="en-US" sz="1000" i="1" dirty="0">
+              <a:rPr lang="ar-SA" sz="1000" i="1" dirty="0">
                 <a:solidFill>
                   <a:srgbClr val="5A6472"/>
                 </a:solidFill>
                 <a:latin typeface="Calibri" pitchFamily="34" charset="0"/>
+                <a:ea typeface="Amiri" pitchFamily="2" charset="-78"/>
                 <a:cs typeface="Amiri" pitchFamily="2" charset="-78"/>
               </a:rPr>
               <a:t>  pl. شَوَارِعُ</a:t>
@@ -44981,6 +45119,7 @@
                   <a:srgbClr val="1B3B6F"/>
                 </a:solidFill>
                 <a:latin typeface="Amiri" pitchFamily="2" charset="-78"/>
+                <a:ea typeface="Amiri" pitchFamily="2" charset="-78"/>
                 <a:cs typeface="Amiri" pitchFamily="2" charset="-78"/>
               </a:rPr>
               <a:t>حَيٌّ</a:t>
@@ -45027,11 +45166,12 @@
               <a:buNone/>
             </a:pPr>
             <a:r>
-              <a:rPr lang="en-US" sz="1000" i="1" dirty="0">
+              <a:rPr lang="ar-SA" sz="1000" i="1" dirty="0">
                 <a:solidFill>
                   <a:srgbClr val="5A6472"/>
                 </a:solidFill>
                 <a:latin typeface="Calibri" pitchFamily="34" charset="0"/>
+                <a:ea typeface="Amiri" pitchFamily="2" charset="-78"/>
                 <a:cs typeface="Amiri" pitchFamily="2" charset="-78"/>
               </a:rPr>
               <a:t>  pl. أَحْيَاءٌ</a:t>
@@ -45070,6 +45210,7 @@
                   <a:srgbClr val="1B3B6F"/>
                 </a:solidFill>
                 <a:latin typeface="Amiri" pitchFamily="2" charset="-78"/>
+                <a:ea typeface="Amiri" pitchFamily="2" charset="-78"/>
                 <a:cs typeface="Amiri" pitchFamily="2" charset="-78"/>
               </a:rPr>
               <a:t>مَرْكَزُ المَدِينَةِ</a:t>
@@ -45159,6 +45300,7 @@
                   <a:srgbClr val="1B3B6F"/>
                 </a:solidFill>
                 <a:latin typeface="Amiri" pitchFamily="2" charset="-78"/>
+                <a:ea typeface="Amiri" pitchFamily="2" charset="-78"/>
                 <a:cs typeface="Amiri" pitchFamily="2" charset="-78"/>
               </a:rPr>
               <a:t>قَرْيَةٌ</a:t>
@@ -45205,11 +45347,12 @@
               <a:buNone/>
             </a:pPr>
             <a:r>
-              <a:rPr lang="en-US" sz="1000" i="1" dirty="0">
+              <a:rPr lang="ar-SA" sz="1000" i="1" dirty="0">
                 <a:solidFill>
                   <a:srgbClr val="5A6472"/>
                 </a:solidFill>
                 <a:latin typeface="Calibri" pitchFamily="34" charset="0"/>
+                <a:ea typeface="Amiri" pitchFamily="2" charset="-78"/>
                 <a:cs typeface="Amiri" pitchFamily="2" charset="-78"/>
               </a:rPr>
               <a:t>  pl. قُرًى</a:t>
@@ -45324,6 +45467,7 @@
                   <a:srgbClr val="1B3B6F"/>
                 </a:solidFill>
                 <a:latin typeface="Amiri" pitchFamily="2" charset="-78"/>
+                <a:ea typeface="Amiri" pitchFamily="2" charset="-78"/>
                 <a:cs typeface="Amiri" pitchFamily="2" charset="-78"/>
               </a:rPr>
               <a:t>أَسْكُنُ فِي …</a:t>
@@ -45993,6 +46137,7 @@
                   <a:srgbClr val="FFFFFF"/>
                 </a:solidFill>
                 <a:latin typeface="Amiri" pitchFamily="2" charset="-78"/>
+                <a:ea typeface="Amiri" pitchFamily="2" charset="-78"/>
                 <a:cs typeface="Amiri" pitchFamily="2" charset="-78"/>
               </a:rPr>
               <a:t>أَحْسَنْتُمْ! إِلَى اللِّقَاءِ</a:t>
@@ -46145,6 +46290,7 @@
                   <a:srgbClr val="D4AF37"/>
                 </a:solidFill>
                 <a:latin typeface="Amiri" pitchFamily="2" charset="-78"/>
+                <a:ea typeface="Amiri" pitchFamily="2" charset="-78"/>
                 <a:cs typeface="Amiri" pitchFamily="2" charset="-78"/>
               </a:rPr>
               <a:t>الأَمَاكِنُ فِي المَدِينَةِ</a:t>
@@ -46278,6 +46424,7 @@
                   <a:srgbClr val="D4AF37"/>
                 </a:solidFill>
                 <a:latin typeface="Amiri" pitchFamily="2" charset="-78"/>
+                <a:ea typeface="Amiri" pitchFamily="2" charset="-78"/>
                 <a:cs typeface="Amiri" pitchFamily="2" charset="-78"/>
               </a:rPr>
               <a:t>م</a:t>
@@ -46598,6 +46745,7 @@
                   <a:srgbClr val="8A6D1E"/>
                 </a:solidFill>
                 <a:latin typeface="Amiri" pitchFamily="2" charset="-78"/>
+                <a:ea typeface="Amiri" pitchFamily="2" charset="-78"/>
                 <a:cs typeface="Amiri" pitchFamily="2" charset="-78"/>
               </a:rPr>
               <a:t>خَرِيطَةُ الدَّرْسِ</a:t>
@@ -46912,6 +47060,7 @@
                   <a:srgbClr val="0E7C86"/>
                 </a:solidFill>
                 <a:latin typeface="Amiri" pitchFamily="2" charset="-78"/>
+                <a:ea typeface="Amiri" pitchFamily="2" charset="-78"/>
                 <a:cs typeface="Amiri" pitchFamily="2" charset="-78"/>
               </a:rPr>
               <a:t>تَهْيِئَةٌ</a:t>
@@ -47188,6 +47337,7 @@
                   <a:srgbClr val="1B3B6F"/>
                 </a:solidFill>
                 <a:latin typeface="Amiri" pitchFamily="2" charset="-78"/>
+                <a:ea typeface="Amiri" pitchFamily="2" charset="-78"/>
                 <a:cs typeface="Amiri" pitchFamily="2" charset="-78"/>
               </a:rPr>
               <a:t>خُطَّةُ التَّقْيِيمِ</a:t>
@@ -47464,6 +47614,7 @@
                   <a:srgbClr val="6B4C9A"/>
                 </a:solidFill>
                 <a:latin typeface="Amiri" pitchFamily="2" charset="-78"/>
+                <a:ea typeface="Amiri" pitchFamily="2" charset="-78"/>
                 <a:cs typeface="Amiri" pitchFamily="2" charset="-78"/>
               </a:rPr>
               <a:t>الاِسْتِمَاعُ</a:t>
@@ -47740,6 +47891,7 @@
                   <a:srgbClr val="2F6FB0"/>
                 </a:solidFill>
                 <a:latin typeface="Amiri" pitchFamily="2" charset="-78"/>
+                <a:ea typeface="Amiri" pitchFamily="2" charset="-78"/>
                 <a:cs typeface="Amiri" pitchFamily="2" charset="-78"/>
               </a:rPr>
               <a:t>القِرَاءَةُ</a:t>
@@ -48016,6 +48168,7 @@
                   <a:srgbClr val="1E6B52"/>
                 </a:solidFill>
                 <a:latin typeface="Amiri" pitchFamily="2" charset="-78"/>
+                <a:ea typeface="Amiri" pitchFamily="2" charset="-78"/>
                 <a:cs typeface="Amiri" pitchFamily="2" charset="-78"/>
               </a:rPr>
               <a:t>الكِتَابَةُ وَالتَّحَدُّثُ</a:t>
@@ -48292,6 +48445,7 @@
                   <a:srgbClr val="8A6D1E"/>
                 </a:solidFill>
                 <a:latin typeface="Amiri" pitchFamily="2" charset="-78"/>
+                <a:ea typeface="Amiri" pitchFamily="2" charset="-78"/>
                 <a:cs typeface="Amiri" pitchFamily="2" charset="-78"/>
               </a:rPr>
               <a:t>الهَدَفُ</a:t>
@@ -48568,6 +48722,7 @@
                   <a:srgbClr val="C45A3C"/>
                 </a:solidFill>
                 <a:latin typeface="Amiri" pitchFamily="2" charset="-78"/>
+                <a:ea typeface="Amiri" pitchFamily="2" charset="-78"/>
                 <a:cs typeface="Amiri" pitchFamily="2" charset="-78"/>
               </a:rPr>
               <a:t>اِسْتَعِدَّ</a:t>
@@ -48811,6 +48966,7 @@
                   <a:srgbClr val="D4AF37"/>
                 </a:solidFill>
                 <a:latin typeface="Amiri" pitchFamily="2" charset="-78"/>
+                <a:ea typeface="Amiri" pitchFamily="2" charset="-78"/>
                 <a:cs typeface="Amiri" pitchFamily="2" charset="-78"/>
               </a:rPr>
               <a:t>م</a:t>
@@ -49131,6 +49287,7 @@
                   <a:srgbClr val="8A6D1E"/>
                 </a:solidFill>
                 <a:latin typeface="Amiri" pitchFamily="2" charset="-78"/>
+                <a:ea typeface="Amiri" pitchFamily="2" charset="-78"/>
                 <a:cs typeface="Amiri" pitchFamily="2" charset="-78"/>
               </a:rPr>
               <a:t>اِبْدَأِ الآنَ</a:t>
@@ -49317,6 +49474,7 @@
                   <a:srgbClr val="1B3B6F"/>
                 </a:solidFill>
                 <a:latin typeface="Amiri" pitchFamily="2" charset="-78"/>
+                <a:ea typeface="Amiri" pitchFamily="2" charset="-78"/>
                 <a:cs typeface="Amiri" pitchFamily="2" charset="-78"/>
               </a:rPr>
               <a:t>تَقْيِيمٌ</a:t>
@@ -49869,6 +50027,7 @@
                   <a:srgbClr val="1F2A37"/>
                 </a:solidFill>
                 <a:latin typeface="Amiri" pitchFamily="2" charset="-78"/>
+                <a:ea typeface="Amiri" pitchFamily="2" charset="-78"/>
                 <a:cs typeface="Amiri" pitchFamily="2" charset="-78"/>
               </a:rPr>
               <a:t>أُفَضِّلُ الفَاكِهَةَ لِأَنَّهَا صِحِّيَّةٌ.</a:t>
@@ -49970,6 +50129,7 @@
                   <a:srgbClr val="1F2A37"/>
                 </a:solidFill>
                 <a:latin typeface="Amiri" pitchFamily="2" charset="-78"/>
+                <a:ea typeface="Amiri" pitchFamily="2" charset="-78"/>
                 <a:cs typeface="Amiri" pitchFamily="2" charset="-78"/>
               </a:rPr>
               <a:t>أُحِبُّ الفَاكِهَةَ لِأَنَّهُ صِحِّيٌّ.</a:t>
@@ -50071,6 +50231,7 @@
                   <a:srgbClr val="1F2A37"/>
                 </a:solidFill>
                 <a:latin typeface="Amiri" pitchFamily="2" charset="-78"/>
+                <a:ea typeface="Amiri" pitchFamily="2" charset="-78"/>
                 <a:cs typeface="Amiri" pitchFamily="2" charset="-78"/>
               </a:rPr>
               <a:t>آكُلُ الفَاكِهَةَ فِي المَدْرَسَةِ.</a:t>
@@ -50307,6 +50468,7 @@
                   <a:srgbClr val="1F2A37"/>
                 </a:solidFill>
                 <a:latin typeface="Amiri" pitchFamily="2" charset="-78"/>
+                <a:ea typeface="Amiri" pitchFamily="2" charset="-78"/>
                 <a:cs typeface="Amiri" pitchFamily="2" charset="-78"/>
               </a:rPr>
               <a:t>مَعِدَتِي لَذِيذَةٌ.</a:t>
@@ -50408,6 +50570,7 @@
                   <a:srgbClr val="1F2A37"/>
                 </a:solidFill>
                 <a:latin typeface="Amiri" pitchFamily="2" charset="-78"/>
+                <a:ea typeface="Amiri" pitchFamily="2" charset="-78"/>
                 <a:cs typeface="Amiri" pitchFamily="2" charset="-78"/>
               </a:rPr>
               <a:t>أَشْرَبُ مَعِدَتِي.</a:t>
@@ -50509,6 +50672,7 @@
                   <a:srgbClr val="1F2A37"/>
                 </a:solidFill>
                 <a:latin typeface="Amiri" pitchFamily="2" charset="-78"/>
+                <a:ea typeface="Amiri" pitchFamily="2" charset="-78"/>
                 <a:cs typeface="Amiri" pitchFamily="2" charset="-78"/>
               </a:rPr>
               <a:t>عِنْدِي أَلَمٌ فِي مَعِدَتِي.</a:t>
@@ -50745,6 +50909,7 @@
                   <a:srgbClr val="1F2A37"/>
                 </a:solidFill>
                 <a:latin typeface="Amiri" pitchFamily="2" charset="-78"/>
+                <a:ea typeface="Amiri" pitchFamily="2" charset="-78"/>
                 <a:cs typeface="Amiri" pitchFamily="2" charset="-78"/>
               </a:rPr>
               <a:t>رَأْسٌ</a:t>
@@ -50846,6 +51011,7 @@
                   <a:srgbClr val="1F2A37"/>
                 </a:solidFill>
                 <a:latin typeface="Amiri" pitchFamily="2" charset="-78"/>
+                <a:ea typeface="Amiri" pitchFamily="2" charset="-78"/>
                 <a:cs typeface="Amiri" pitchFamily="2" charset="-78"/>
               </a:rPr>
               <a:t>ظَهْرٌ</a:t>
@@ -50947,6 +51113,7 @@
                   <a:srgbClr val="1F2A37"/>
                 </a:solidFill>
                 <a:latin typeface="Amiri" pitchFamily="2" charset="-78"/>
+                <a:ea typeface="Amiri" pitchFamily="2" charset="-78"/>
                 <a:cs typeface="Amiri" pitchFamily="2" charset="-78"/>
               </a:rPr>
               <a:t>يَدٌ</a:t>
@@ -51183,6 +51350,7 @@
                   <a:srgbClr val="1F2A37"/>
                 </a:solidFill>
                 <a:latin typeface="Amiri" pitchFamily="2" charset="-78"/>
+                <a:ea typeface="Amiri" pitchFamily="2" charset="-78"/>
                 <a:cs typeface="Amiri" pitchFamily="2" charset="-78"/>
               </a:rPr>
               <a:t>الحِسَابُ، لَوْ سَمَحْتَ.</a:t>
@@ -51284,6 +51452,7 @@
                   <a:srgbClr val="1F2A37"/>
                 </a:solidFill>
                 <a:latin typeface="Amiri" pitchFamily="2" charset="-78"/>
+                <a:ea typeface="Amiri" pitchFamily="2" charset="-78"/>
                 <a:cs typeface="Amiri" pitchFamily="2" charset="-78"/>
               </a:rPr>
               <a:t>قَائِمَةُ الطَّعَامِ.</a:t>
@@ -51385,6 +51554,7 @@
                   <a:srgbClr val="1F2A37"/>
                 </a:solidFill>
                 <a:latin typeface="Amiri" pitchFamily="2" charset="-78"/>
+                <a:ea typeface="Amiri" pitchFamily="2" charset="-78"/>
                 <a:cs typeface="Amiri" pitchFamily="2" charset="-78"/>
               </a:rPr>
               <a:t>هَلْ عِنْدَكُمْ حَسَاءٌ؟</a:t>
@@ -51720,6 +51890,7 @@
                   <a:srgbClr val="D4AF37"/>
                 </a:solidFill>
                 <a:latin typeface="Amiri" pitchFamily="2" charset="-78"/>
+                <a:ea typeface="Amiri" pitchFamily="2" charset="-78"/>
                 <a:cs typeface="Amiri" pitchFamily="2" charset="-78"/>
               </a:rPr>
               <a:t>م</a:t>
@@ -52040,6 +52211,7 @@
                   <a:srgbClr val="8A6D1E"/>
                 </a:solidFill>
                 <a:latin typeface="Amiri" pitchFamily="2" charset="-78"/>
+                <a:ea typeface="Amiri" pitchFamily="2" charset="-78"/>
                 <a:cs typeface="Amiri" pitchFamily="2" charset="-78"/>
               </a:rPr>
               <a:t>الإِجَابَاتُ وَالتَّعْلِيلُ</a:t>
@@ -52226,6 +52398,7 @@
                   <a:srgbClr val="1B3B6F"/>
                 </a:solidFill>
                 <a:latin typeface="Amiri" pitchFamily="2" charset="-78"/>
+                <a:ea typeface="Amiri" pitchFamily="2" charset="-78"/>
                 <a:cs typeface="Amiri" pitchFamily="2" charset="-78"/>
               </a:rPr>
               <a:t>تَقْيِيمٌ</a:t>
@@ -52870,6 +53043,7 @@
                   <a:srgbClr val="1F2A37"/>
                 </a:solidFill>
                 <a:latin typeface="Amiri" pitchFamily="2" charset="-78"/>
+                <a:ea typeface="Amiri" pitchFamily="2" charset="-78"/>
                 <a:cs typeface="Amiri" pitchFamily="2" charset="-78"/>
               </a:rPr>
               <a:t>أُفَضِّلُ الفَاكِهَةَ لِأَنَّهَا صِحِّيَّةٌ.</a:t>
@@ -52971,6 +53145,7 @@
                   <a:srgbClr val="9AA1AB"/>
                 </a:solidFill>
                 <a:latin typeface="Amiri" pitchFamily="2" charset="-78"/>
+                <a:ea typeface="Amiri" pitchFamily="2" charset="-78"/>
                 <a:cs typeface="Amiri" pitchFamily="2" charset="-78"/>
               </a:rPr>
               <a:t>أُحِبُّ الفَاكِهَةَ لِأَنَّهُ صِحِّيٌّ.</a:t>
@@ -53072,6 +53247,7 @@
                   <a:srgbClr val="9AA1AB"/>
                 </a:solidFill>
                 <a:latin typeface="Amiri" pitchFamily="2" charset="-78"/>
+                <a:ea typeface="Amiri" pitchFamily="2" charset="-78"/>
                 <a:cs typeface="Amiri" pitchFamily="2" charset="-78"/>
               </a:rPr>
               <a:t>آكُلُ الفَاكِهَةَ فِي المَدْرَسَةِ.</a:t>
@@ -53346,6 +53522,7 @@
                   <a:srgbClr val="9AA1AB"/>
                 </a:solidFill>
                 <a:latin typeface="Amiri" pitchFamily="2" charset="-78"/>
+                <a:ea typeface="Amiri" pitchFamily="2" charset="-78"/>
                 <a:cs typeface="Amiri" pitchFamily="2" charset="-78"/>
               </a:rPr>
               <a:t>مَعِدَتِي لَذِيذَةٌ.</a:t>
@@ -53447,6 +53624,7 @@
                   <a:srgbClr val="9AA1AB"/>
                 </a:solidFill>
                 <a:latin typeface="Amiri" pitchFamily="2" charset="-78"/>
+                <a:ea typeface="Amiri" pitchFamily="2" charset="-78"/>
                 <a:cs typeface="Amiri" pitchFamily="2" charset="-78"/>
               </a:rPr>
               <a:t>أَشْرَبُ مَعِدَتِي.</a:t>
@@ -53575,6 +53753,7 @@
                   <a:srgbClr val="1F2A37"/>
                 </a:solidFill>
                 <a:latin typeface="Amiri" pitchFamily="2" charset="-78"/>
+                <a:ea typeface="Amiri" pitchFamily="2" charset="-78"/>
                 <a:cs typeface="Amiri" pitchFamily="2" charset="-78"/>
               </a:rPr>
               <a:t>عِنْدِي أَلَمٌ فِي مَعِدَتِي.</a:t>
@@ -53849,6 +54028,7 @@
                   <a:srgbClr val="9AA1AB"/>
                 </a:solidFill>
                 <a:latin typeface="Amiri" pitchFamily="2" charset="-78"/>
+                <a:ea typeface="Amiri" pitchFamily="2" charset="-78"/>
                 <a:cs typeface="Amiri" pitchFamily="2" charset="-78"/>
               </a:rPr>
               <a:t>رَأْسٌ</a:t>
@@ -53950,6 +54130,7 @@
                   <a:srgbClr val="9AA1AB"/>
                 </a:solidFill>
                 <a:latin typeface="Amiri" pitchFamily="2" charset="-78"/>
+                <a:ea typeface="Amiri" pitchFamily="2" charset="-78"/>
                 <a:cs typeface="Amiri" pitchFamily="2" charset="-78"/>
               </a:rPr>
               <a:t>ظَهْرٌ</a:t>
@@ -54078,6 +54259,7 @@
                   <a:srgbClr val="1F2A37"/>
                 </a:solidFill>
                 <a:latin typeface="Amiri" pitchFamily="2" charset="-78"/>
+                <a:ea typeface="Amiri" pitchFamily="2" charset="-78"/>
                 <a:cs typeface="Amiri" pitchFamily="2" charset="-78"/>
               </a:rPr>
               <a:t>يَدٌ</a:t>
@@ -54379,6 +54561,7 @@
                   <a:srgbClr val="1F2A37"/>
                 </a:solidFill>
                 <a:latin typeface="Amiri" pitchFamily="2" charset="-78"/>
+                <a:ea typeface="Amiri" pitchFamily="2" charset="-78"/>
                 <a:cs typeface="Amiri" pitchFamily="2" charset="-78"/>
               </a:rPr>
               <a:t>الحِسَابُ، لَوْ سَمَحْتَ.</a:t>
@@ -54480,6 +54663,7 @@
                   <a:srgbClr val="9AA1AB"/>
                 </a:solidFill>
                 <a:latin typeface="Amiri" pitchFamily="2" charset="-78"/>
+                <a:ea typeface="Amiri" pitchFamily="2" charset="-78"/>
                 <a:cs typeface="Amiri" pitchFamily="2" charset="-78"/>
               </a:rPr>
               <a:t>قَائِمَةُ الطَّعَامِ.</a:t>
@@ -54581,6 +54765,7 @@
                   <a:srgbClr val="9AA1AB"/>
                 </a:solidFill>
                 <a:latin typeface="Amiri" pitchFamily="2" charset="-78"/>
+                <a:ea typeface="Amiri" pitchFamily="2" charset="-78"/>
                 <a:cs typeface="Amiri" pitchFamily="2" charset="-78"/>
               </a:rPr>
               <a:t>هَلْ عِنْدَكُمْ حَسَاءٌ؟</a:t>
@@ -54767,6 +54952,7 @@
                   <a:srgbClr val="1B3B6F"/>
                 </a:solidFill>
                 <a:latin typeface="Amiri" pitchFamily="2" charset="-78"/>
+                <a:ea typeface="Amiri" pitchFamily="2" charset="-78"/>
                 <a:cs typeface="Amiri" pitchFamily="2" charset="-78"/>
               </a:rPr>
               <a:t>اِقْرَأْ · اِبْحَثْ عَنِ الدَّلِيلِ · أَجِبْ</a:t>
@@ -54900,6 +55086,7 @@
                   <a:srgbClr val="D4AF37"/>
                 </a:solidFill>
                 <a:latin typeface="Amiri" pitchFamily="2" charset="-78"/>
+                <a:ea typeface="Amiri" pitchFamily="2" charset="-78"/>
                 <a:cs typeface="Amiri" pitchFamily="2" charset="-78"/>
               </a:rPr>
               <a:t>م</a:t>
@@ -55220,6 +55407,7 @@
                   <a:srgbClr val="8A6D1E"/>
                 </a:solidFill>
                 <a:latin typeface="Amiri" pitchFamily="2" charset="-78"/>
+                <a:ea typeface="Amiri" pitchFamily="2" charset="-78"/>
                 <a:cs typeface="Amiri" pitchFamily="2" charset="-78"/>
               </a:rPr>
               <a:t>مُرَاجَعَةُ القَوَاعِدِ</a:t>
@@ -55395,6 +55583,7 @@
                   <a:srgbClr val="8A6D1E"/>
                 </a:solidFill>
                 <a:latin typeface="Amiri" pitchFamily="2" charset="-78"/>
+                <a:ea typeface="Amiri" pitchFamily="2" charset="-78"/>
                 <a:cs typeface="Amiri" pitchFamily="2" charset="-78"/>
               </a:rPr>
               <a:t>لِأَنَّهُ · لِأَنَّهَا</a:t>
@@ -55433,6 +55622,7 @@
                   <a:srgbClr val="1B3B6F"/>
                 </a:solidFill>
                 <a:latin typeface="Amiri" pitchFamily="2" charset="-78"/>
+                <a:ea typeface="Amiri" pitchFamily="2" charset="-78"/>
                 <a:cs typeface="Amiri" pitchFamily="2" charset="-78"/>
               </a:rPr>
               <a:t>السَّلَطَةُ صِحِّيَّةٌ لِأَنَّهَا طَازَجَةٌ.</a:t>
@@ -55673,6 +55863,7 @@
                   <a:srgbClr val="8A6D1E"/>
                 </a:solidFill>
                 <a:latin typeface="Amiri" pitchFamily="2" charset="-78"/>
+                <a:ea typeface="Amiri" pitchFamily="2" charset="-78"/>
                 <a:cs typeface="Amiri" pitchFamily="2" charset="-78"/>
               </a:rPr>
               <a:t>عِنْدِي … فِي … مُنْذُ …</a:t>
@@ -55714,6 +55905,7 @@
                   <a:srgbClr val="1B3B6F"/>
                 </a:solidFill>
                 <a:latin typeface="Amiri" pitchFamily="2" charset="-78"/>
+                <a:ea typeface="Amiri" pitchFamily="2" charset="-78"/>
                 <a:cs typeface="Amiri" pitchFamily="2" charset="-78"/>
               </a:rPr>
               <a:t>عِنْدِي أَلَمٌ فِي مَعِدَتِي مُنْذُ يَوْمَيْنِ.</a:t>
@@ -55911,11 +56103,12 @@
               <a:buNone/>
             </a:pPr>
             <a:r>
-              <a:rPr lang="en-US" sz="850" b="1" spc="100" kern="0" dirty="0">
+              <a:rPr lang="ar-SA" sz="850" b="1" spc="100" kern="0" dirty="0">
                 <a:solidFill>
                   <a:srgbClr val="FFFFFF"/>
                 </a:solidFill>
                 <a:latin typeface="Calibri" pitchFamily="34" charset="0"/>
+                <a:ea typeface="Amiri" pitchFamily="2" charset="-78"/>
                 <a:cs typeface="Amiri" pitchFamily="2" charset="-78"/>
               </a:rPr>
               <a:t>ADVICE + أَنْ</a:t>
@@ -55954,6 +56147,7 @@
                   <a:srgbClr val="8A6D1E"/>
                 </a:solidFill>
                 <a:latin typeface="Amiri" pitchFamily="2" charset="-78"/>
+                <a:ea typeface="Amiri" pitchFamily="2" charset="-78"/>
                 <a:cs typeface="Amiri" pitchFamily="2" charset="-78"/>
               </a:rPr>
               <a:t>يَجِبُ أَنْ · مِنَ الأَفْضَلِ أَنْ</a:t>
@@ -55992,6 +56186,7 @@
                   <a:srgbClr val="1B3B6F"/>
                 </a:solidFill>
                 <a:latin typeface="Amiri" pitchFamily="2" charset="-78"/>
+                <a:ea typeface="Amiri" pitchFamily="2" charset="-78"/>
                 <a:cs typeface="Amiri" pitchFamily="2" charset="-78"/>
               </a:rPr>
               <a:t>مِنَ الأَفْضَلِ أَنْ تَنَامَ مُبَكِّرًا.</a:t>
@@ -56246,6 +56441,7 @@
                   <a:srgbClr val="1B3B6F"/>
                 </a:solidFill>
                 <a:latin typeface="Amiri" pitchFamily="2" charset="-78"/>
+                <a:ea typeface="Amiri" pitchFamily="2" charset="-78"/>
                 <a:cs typeface="Amiri" pitchFamily="2" charset="-78"/>
               </a:rPr>
               <a:t>أَنَا أَتَنَاوَلُ الفُطُورَ.</a:t>
@@ -56325,6 +56521,7 @@
                   <a:srgbClr val="B83227"/>
                 </a:solidFill>
                 <a:latin typeface="Amiri" pitchFamily="2" charset="-78"/>
+                <a:ea typeface="Amiri" pitchFamily="2" charset="-78"/>
                 <a:cs typeface="Amiri" pitchFamily="2" charset="-78"/>
               </a:rPr>
               <a:t>أَنَا تَتَنَاوَلُ الفُطُورَ.</a:t>
@@ -56481,6 +56678,7 @@
                   <a:srgbClr val="D4AF37"/>
                 </a:solidFill>
                 <a:latin typeface="Amiri" pitchFamily="2" charset="-78"/>
+                <a:ea typeface="Amiri" pitchFamily="2" charset="-78"/>
                 <a:cs typeface="Amiri" pitchFamily="2" charset="-78"/>
               </a:rPr>
               <a:t>م</a:t>
@@ -56801,6 +56999,7 @@
                   <a:srgbClr val="8A6D1E"/>
                 </a:solidFill>
                 <a:latin typeface="Amiri" pitchFamily="2" charset="-78"/>
+                <a:ea typeface="Amiri" pitchFamily="2" charset="-78"/>
                 <a:cs typeface="Amiri" pitchFamily="2" charset="-78"/>
               </a:rPr>
               <a:t>خُطَّةُ التَّقْيِيمِ</a:t>
@@ -57935,6 +58134,7 @@
                   <a:srgbClr val="D4AF37"/>
                 </a:solidFill>
                 <a:latin typeface="Amiri" pitchFamily="2" charset="-78"/>
+                <a:ea typeface="Amiri" pitchFamily="2" charset="-78"/>
                 <a:cs typeface="Amiri" pitchFamily="2" charset="-78"/>
               </a:rPr>
               <a:t>م</a:t>
@@ -58255,6 +58455,7 @@
                   <a:srgbClr val="8A6D1E"/>
                 </a:solidFill>
                 <a:latin typeface="Amiri" pitchFamily="2" charset="-78"/>
+                <a:ea typeface="Amiri" pitchFamily="2" charset="-78"/>
                 <a:cs typeface="Amiri" pitchFamily="2" charset="-78"/>
               </a:rPr>
               <a:t>الاِسْتِمَاعُ · النَّصُّ الأَوَّلُ</a:t>
@@ -60616,6 +60817,7 @@
                   <a:srgbClr val="D4AF37"/>
                 </a:solidFill>
                 <a:latin typeface="Amiri" pitchFamily="2" charset="-78"/>
+                <a:ea typeface="Amiri" pitchFamily="2" charset="-78"/>
                 <a:cs typeface="Amiri" pitchFamily="2" charset="-78"/>
               </a:rPr>
               <a:t>م</a:t>
@@ -60936,6 +61138,7 @@
                   <a:srgbClr val="8A6D1E"/>
                 </a:solidFill>
                 <a:latin typeface="Amiri" pitchFamily="2" charset="-78"/>
+                <a:ea typeface="Amiri" pitchFamily="2" charset="-78"/>
                 <a:cs typeface="Amiri" pitchFamily="2" charset="-78"/>
               </a:rPr>
               <a:t>الإِجَابَاتُ</a:t>
@@ -61477,6 +61680,7 @@
                   <a:srgbClr val="8A6D1E"/>
                 </a:solidFill>
                 <a:latin typeface="Amiri" pitchFamily="2" charset="-78"/>
+                <a:ea typeface="Amiri" pitchFamily="2" charset="-78"/>
                 <a:cs typeface="Amiri" pitchFamily="2" charset="-78"/>
               </a:rPr>
               <a:t>الزَّبَادِي وَالفَاكِهَةَ وَقِطْعَةً مِنَ الخُبْزِ</a:t>
@@ -61980,6 +62184,7 @@
                   <a:srgbClr val="8A6D1E"/>
                 </a:solidFill>
                 <a:latin typeface="Amiri" pitchFamily="2" charset="-78"/>
+                <a:ea typeface="Amiri" pitchFamily="2" charset="-78"/>
                 <a:cs typeface="Amiri" pitchFamily="2" charset="-78"/>
               </a:rPr>
               <a:t>كُوبًا مِنَ الحَلِيبِ</a:t>
@@ -62483,6 +62688,7 @@
                   <a:srgbClr val="8A6D1E"/>
                 </a:solidFill>
                 <a:latin typeface="Amiri" pitchFamily="2" charset="-78"/>
+                <a:ea typeface="Amiri" pitchFamily="2" charset="-78"/>
                 <a:cs typeface="Amiri" pitchFamily="2" charset="-78"/>
               </a:rPr>
               <a:t>تَحْتَوِي عَلَى سُكَّرٍ كَثِيرٍ</a:t>
@@ -62986,6 +63192,7 @@
                   <a:srgbClr val="8A6D1E"/>
                 </a:solidFill>
                 <a:latin typeface="Amiri" pitchFamily="2" charset="-78"/>
+                <a:ea typeface="Amiri" pitchFamily="2" charset="-78"/>
                 <a:cs typeface="Amiri" pitchFamily="2" charset="-78"/>
               </a:rPr>
               <a:t>فِي الغَدَاءِ آكُلُ الدَّجَاجَ مَعَ الأَرُزِّ</a:t>
@@ -63489,6 +63696,7 @@
                   <a:srgbClr val="8A6D1E"/>
                 </a:solidFill>
                 <a:latin typeface="Amiri" pitchFamily="2" charset="-78"/>
+                <a:ea typeface="Amiri" pitchFamily="2" charset="-78"/>
                 <a:cs typeface="Amiri" pitchFamily="2" charset="-78"/>
               </a:rPr>
               <a:t>أَنْ أَزِيدَ كَمِّيَّةَ المَاءِ</a:t>
@@ -63587,13 +63795,9 @@
     <a:fontScheme name="Office">
       <a:majorFont>
         <a:latin typeface="Calibri Light" panose="020F0302020204030204"/>
-        <a:ea typeface=""/>
-        <a:cs typeface=""/>
-        <a:font script="Jpan" typeface="游ゴシック Light"/>
-        <a:font script="Hang" typeface="맑은 고딕"/>
-        <a:font script="Hans" typeface="等线 Light"/>
-        <a:font script="Hant" typeface="新細明體"/>
-        <a:font script="Arab" typeface="Times New Roman"/>
+        <a:ea typeface="Amiri" pitchFamily="2" charset="-78"/>
+        <a:cs typeface="Amiri" pitchFamily="2" charset="-78"/>
+        <a:font script="Arab" typeface="Amiri"/>
         <a:font script="Hebr" typeface="Times New Roman"/>
         <a:font script="Thai" typeface="Angsana New"/>
         <a:font script="Ethi" typeface="Nyala"/>
@@ -63639,13 +63843,9 @@
       </a:majorFont>
       <a:minorFont>
         <a:latin typeface="Calibri" panose="020F0502020204030204"/>
-        <a:ea typeface=""/>
-        <a:cs typeface=""/>
-        <a:font script="Jpan" typeface="游ゴシック"/>
-        <a:font script="Hang" typeface="맑은 고딕"/>
-        <a:font script="Hans" typeface="等线"/>
-        <a:font script="Hant" typeface="新細明體"/>
-        <a:font script="Arab" typeface="Arial"/>
+        <a:ea typeface="Amiri" pitchFamily="2" charset="-78"/>
+        <a:cs typeface="Amiri" pitchFamily="2" charset="-78"/>
+        <a:font script="Arab" typeface="Amiri"/>
         <a:font script="Hebr" typeface="Arial"/>
         <a:font script="Thai" typeface="Cordia New"/>
         <a:font script="Ethi" typeface="Nyala"/>
